--- a/classes/parte-13-seguridad-movil-iot-e-inalambrica/269-radio-definida-por-software-sdr/clase-269-presentacion.pptx
+++ b/classes/parte-13-seguridad-movil-iot-e-inalambrica/269-radio-definida-por-software-sdr/clase-269-presentacion.pptx
@@ -3131,7 +3131,7 @@
                   <a:srgbClr val="0B3D2E"/>
                 </a:solidFill>
               </a:rPr>
-              <a:t>Clase 269 — Radio definida por software (SDR)</a:t>
+              <a:t>Clase 269 — Radio definida por software (SDR) e investigación de interferencias</a:t>
             </a:r>
           </a:p>
           <a:p>
@@ -3202,7 +3202,7 @@
                   <a:srgbClr val="0B3D2E"/>
                 </a:solidFill>
               </a:rPr>
-              <a:t>🧪 Laboratorio guiado</a:t>
+              <a:t>🧪 Laboratorio guiado — Investigación sin emisiones</a:t>
             </a:r>
           </a:p>
         </p:txBody>
@@ -3240,97 +3240,97 @@
                   <a:srgbClr val="22282E"/>
                 </a:solidFill>
               </a:rPr>
-              <a:t>•  Conecta el SDR y verifica con rtltest que funciona sin pérdidas de muestras.</a:t>
-            </a:r>
-          </a:p>
-          <a:p>
-            <a:pPr>
-              <a:spcAft>
-                <a:spcPts val="600"/>
-              </a:spcAft>
-            </a:pPr>
-            <a:r>
-              <a:rPr sz="1500">
-                <a:solidFill>
-                  <a:srgbClr val="22282E"/>
-                </a:solidFill>
-              </a:rPr>
-              <a:t>•  Explora el espectro: en GQRX, sintoniza la banda ISM de 433 MHz y observa el waterfall mientras accionas un mando propio.</a:t>
-            </a:r>
-          </a:p>
-          <a:p>
-            <a:pPr>
-              <a:spcAft>
-                <a:spcPts val="600"/>
-              </a:spcAft>
-            </a:pPr>
-            <a:r>
-              <a:rPr sz="1500">
-                <a:solidFill>
-                  <a:srgbClr val="22282E"/>
-                </a:solidFill>
-              </a:rPr>
-              <a:t>•  Localiza la señal: identifica la frecuencia central exacta de la ráfaga del mando.</a:t>
-            </a:r>
-          </a:p>
-          <a:p>
-            <a:pPr>
-              <a:spcAft>
-                <a:spcPts val="600"/>
-              </a:spcAft>
-            </a:pPr>
-            <a:r>
-              <a:rPr sz="1500">
-                <a:solidFill>
-                  <a:srgbClr val="22282E"/>
-                </a:solidFill>
-              </a:rPr>
-              <a:t>•  Captura IQ: graba la transmisión con rtlsdr o desde URH a la frecuencia adecuada.</a:t>
-            </a:r>
-          </a:p>
-          <a:p>
-            <a:pPr>
-              <a:spcAft>
-                <a:spcPts val="600"/>
-              </a:spcAft>
-            </a:pPr>
-            <a:r>
-              <a:rPr sz="1500">
-                <a:solidFill>
-                  <a:srgbClr val="22282E"/>
-                </a:solidFill>
-              </a:rPr>
-              <a:t>•  Determina la modulación: en URH, visualiza la señal y decide si es OOK/ASK o FSK.</a:t>
-            </a:r>
-          </a:p>
-          <a:p>
-            <a:pPr>
-              <a:spcAft>
-                <a:spcPts val="600"/>
-              </a:spcAft>
-            </a:pPr>
-            <a:r>
-              <a:rPr sz="1500">
-                <a:solidFill>
-                  <a:srgbClr val="22282E"/>
-                </a:solidFill>
-              </a:rPr>
-              <a:t>•  Demodula y decodifica: ajusta parámetros (samples/símbolo, umbral) hasta obtener los bits; identifica preámbulo y payload.</a:t>
-            </a:r>
-          </a:p>
-          <a:p>
-            <a:pPr>
-              <a:spcAft>
-                <a:spcPts val="600"/>
-              </a:spcAft>
-            </a:pPr>
-            <a:r>
-              <a:rPr sz="1500">
-                <a:solidFill>
-                  <a:srgbClr val="22282E"/>
-                </a:solidFill>
-              </a:rPr>
-              <a:t>•  Interpreta el protocolo: compara varias pulsaciones para ver qué campos cambian (contador rolling code vs. código fijo).</a:t>
+              <a:t>•  Objetivo. Clasificar un incidente de disponibilidad usando grabaciones y logs, sin transmitir.</a:t>
+            </a:r>
+          </a:p>
+          <a:p>
+            <a:pPr>
+              <a:spcAft>
+                <a:spcPts val="600"/>
+              </a:spcAft>
+            </a:pPr>
+            <a:r>
+              <a:rPr sz="1500">
+                <a:solidFill>
+                  <a:srgbClr val="22282E"/>
+                </a:solidFill>
+              </a:rPr>
+              <a:t>•  Topología. Archivos IQ/SigMF → estación offline de análisis; CSV de AP y clientes → cuaderno de tiempo; registro de switch/servicio → línea de base. Todos los datos son sintéticos o de un banco…</a:t>
+            </a:r>
+          </a:p>
+          <a:p>
+            <a:pPr>
+              <a:spcAft>
+                <a:spcPts val="600"/>
+              </a:spcAft>
+            </a:pPr>
+            <a:r>
+              <a:rPr sz="1500">
+                <a:solidFill>
+                  <a:srgbClr val="22282E"/>
+                </a:solidFill>
+              </a:rPr>
+              <a:t>•  Procedimiento.</a:t>
+            </a:r>
+          </a:p>
+          <a:p>
+            <a:pPr>
+              <a:spcAft>
+                <a:spcPts val="600"/>
+              </a:spcAft>
+            </a:pPr>
+            <a:r>
+              <a:rPr sz="1500">
+                <a:solidFill>
+                  <a:srgbClr val="22282E"/>
+                </a:solidFill>
+              </a:rPr>
+              <a:t>•  Copia los archivos como solo lectura, calcula SHA-256 y revisa metadatos: hora UTC, frecuencia, tasa, formato, ganancia y origen.</a:t>
+            </a:r>
+          </a:p>
+          <a:p>
+            <a:pPr>
+              <a:spcAft>
+                <a:spcPts val="600"/>
+              </a:spcAft>
+            </a:pPr>
+            <a:r>
+              <a:rPr sz="1500">
+                <a:solidFill>
+                  <a:srgbClr val="22282E"/>
+                </a:solidFill>
+              </a:rPr>
+              <a:t>•  Genera espectro y cascada con los mismos parámetros para línea base e incidente. No normalices cada imagen de forma independiente sin anotarlo, porque esconderías diferencias de nivel.</a:t>
+            </a:r>
+          </a:p>
+          <a:p>
+            <a:pPr>
+              <a:spcAft>
+                <a:spcPts val="600"/>
+              </a:spcAft>
+            </a:pPr>
+            <a:r>
+              <a:rPr sz="1500">
+                <a:solidFill>
+                  <a:srgbClr val="22282E"/>
+                </a:solidFill>
+              </a:rPr>
+              <a:t>•  Marca inicio/fin de cada anomalía, ancho de banda aparente y si se mueve o permanece. Busca clipping o simetrías compatibles con artefacto.</a:t>
+            </a:r>
+          </a:p>
+          <a:p>
+            <a:pPr>
+              <a:spcAft>
+                <a:spcPts val="600"/>
+              </a:spcAft>
+            </a:pPr>
+            <a:r>
+              <a:rPr sz="1500">
+                <a:solidFill>
+                  <a:srgbClr val="22282E"/>
+                </a:solidFill>
+              </a:rPr>
+              <a:t>•  Une por tiempo con canal, ruido reportado, retransmisiones, desconexiones, CPU/reinicios de AP y estado del enlace cableado.</a:t>
             </a:r>
           </a:p>
         </p:txBody>
@@ -3419,82 +3419,82 @@
                   <a:srgbClr val="22282E"/>
                 </a:solidFill>
               </a:rPr>
-              <a:t>•  Identifica la frecuencia central de un mando propio con GQRX.</a:t>
-            </a:r>
-          </a:p>
-          <a:p>
-            <a:pPr>
-              <a:spcAft>
-                <a:spcPts val="600"/>
-              </a:spcAft>
-            </a:pPr>
-            <a:r>
-              <a:rPr sz="1500">
-                <a:solidFill>
-                  <a:srgbClr val="22282E"/>
-                </a:solidFill>
-              </a:rPr>
-              <a:t>•  Captura tres pulsaciones del mismo botón a fichero IQ.</a:t>
-            </a:r>
-          </a:p>
-          <a:p>
-            <a:pPr>
-              <a:spcAft>
-                <a:spcPts val="600"/>
-              </a:spcAft>
-            </a:pPr>
-            <a:r>
-              <a:rPr sz="1500">
-                <a:solidFill>
-                  <a:srgbClr val="22282E"/>
-                </a:solidFill>
-              </a:rPr>
-              <a:t>•  Clasifica la modulación observando la forma de onda en URH.</a:t>
-            </a:r>
-          </a:p>
-          <a:p>
-            <a:pPr>
-              <a:spcAft>
-                <a:spcPts val="600"/>
-              </a:spcAft>
-            </a:pPr>
-            <a:r>
-              <a:rPr sz="1500">
-                <a:solidFill>
-                  <a:srgbClr val="22282E"/>
-                </a:solidFill>
-              </a:rPr>
-              <a:t>•  Decodifica los bits de la trama y localiza el preámbulo.</a:t>
-            </a:r>
-          </a:p>
-          <a:p>
-            <a:pPr>
-              <a:spcAft>
-                <a:spcPts val="600"/>
-              </a:spcAft>
-            </a:pPr>
-            <a:r>
-              <a:rPr sz="1500">
-                <a:solidFill>
-                  <a:srgbClr val="22282E"/>
-                </a:solidFill>
-              </a:rPr>
-              <a:t>•  Compara pulsaciones para determinar si usa código fijo o rolling code.</a:t>
-            </a:r>
-          </a:p>
-          <a:p>
-            <a:pPr>
-              <a:spcAft>
-                <a:spcPts val="600"/>
-              </a:spcAft>
-            </a:pPr>
-            <a:r>
-              <a:rPr sz="1500">
-                <a:solidFill>
-                  <a:srgbClr val="22282E"/>
-                </a:solidFill>
-              </a:rPr>
-              <a:t>•  Documenta los parámetros necesarios para reproducir la captura.</a:t>
+              <a:t>•  Calcula el caudal aproximado de una captura HackRF a 20 Msps con I/Q de 8 bits por componente y explica el impacto en almacenamiento.</a:t>
+            </a:r>
+          </a:p>
+          <a:p>
+            <a:pPr>
+              <a:spcAft>
+                <a:spcPts val="600"/>
+              </a:spcAft>
+            </a:pPr>
+            <a:r>
+              <a:rPr sz="1500">
+                <a:solidFill>
+                  <a:srgbClr val="22282E"/>
+                </a:solidFill>
+              </a:rPr>
+              <a:t>•  Explica por qué ver una portadora fuerte no demuestra jamming.</a:t>
+            </a:r>
+          </a:p>
+          <a:p>
+            <a:pPr>
+              <a:spcAft>
+                <a:spcPts val="600"/>
+              </a:spcAft>
+            </a:pPr>
+            <a:r>
+              <a:rPr sz="1500">
+                <a:solidFill>
+                  <a:srgbClr val="22282E"/>
+                </a:solidFill>
+              </a:rPr>
+              <a:t>•  Compara HackRF One, RTL-SDR y analizador de espectro para una investigación de 915 MHz.</a:t>
+            </a:r>
+          </a:p>
+          <a:p>
+            <a:pPr>
+              <a:spcAft>
+                <a:spcPts val="600"/>
+              </a:spcAft>
+            </a:pPr>
+            <a:r>
+              <a:rPr sz="1500">
+                <a:solidFill>
+                  <a:srgbClr val="22282E"/>
+                </a:solidFill>
+              </a:rPr>
+              <a:t>•  Diseña tres controles para distinguir saturación del receptor de una señal externa.</a:t>
+            </a:r>
+          </a:p>
+          <a:p>
+            <a:pPr>
+              <a:spcAft>
+                <a:spcPts val="600"/>
+              </a:spcAft>
+            </a:pPr>
+            <a:r>
+              <a:rPr sz="1500">
+                <a:solidFill>
+                  <a:srgbClr val="22282E"/>
+                </a:solidFill>
+              </a:rPr>
+              <a:t>•  Separa qué puede inferirse de una captura cifrada y qué requeriría claves/autorización adicional.</a:t>
+            </a:r>
+          </a:p>
+          <a:p>
+            <a:pPr>
+              <a:spcAft>
+                <a:spcPts val="600"/>
+              </a:spcAft>
+            </a:pPr>
+            <a:r>
+              <a:rPr sz="1500">
+                <a:solidFill>
+                  <a:srgbClr val="22282E"/>
+                </a:solidFill>
+              </a:rPr>
+              <a:t>•  Redacta un informe de escalamiento para SUBTEL sin atribuir intención.</a:t>
             </a:r>
           </a:p>
         </p:txBody>
@@ -3583,7 +3583,22 @@
                   <a:srgbClr val="22282E"/>
                 </a:solidFill>
               </a:rPr>
-              <a:t>•  Captura y decodifica la señal de un dispositivo sub-GHz propio (mando de garaje viejo, estación meteorológica, sensor). Criterio de aceptación: entregas la frecuencia, la modulación y la tasa de…</a:t>
+              <a:t>•  Analiza el caso integrado de degradación inalámbrica y entrega timeline, espectrogramas comparables, tabla de hipótesis, decisión de continuidad, evidencia preservada y límites.</a:t>
+            </a:r>
+          </a:p>
+          <a:p>
+            <a:pPr>
+              <a:spcAft>
+                <a:spcPts val="600"/>
+              </a:spcAft>
+            </a:pPr>
+            <a:r>
+              <a:rPr sz="1500">
+                <a:solidFill>
+                  <a:srgbClr val="22282E"/>
+                </a:solidFill>
+              </a:rPr>
+              <a:t>•  Criterio de aceptación: el alumno distingue recepción/transmisión/repetición/suplantación/interferencia; identifica al menos un artefacto del receptor; no propone adquirir ni operar inhibidores; y…</a:t>
             </a:r>
           </a:p>
         </p:txBody>
@@ -3672,67 +3687,97 @@
                   <a:srgbClr val="22282E"/>
                 </a:solidFill>
               </a:rPr>
-              <a:t>•  rtltest reporta pérdidas — USB saturado o ganancia mal; baja el sample rate</a:t>
-            </a:r>
-          </a:p>
-          <a:p>
-            <a:pPr>
-              <a:spcAft>
-                <a:spcPts val="600"/>
-              </a:spcAft>
-            </a:pPr>
-            <a:r>
-              <a:rPr sz="1500">
-                <a:solidFill>
-                  <a:srgbClr val="22282E"/>
-                </a:solidFill>
-              </a:rPr>
-              <a:t>•  No veo la señal en el waterfall — Frecuencia/ganancia incorrectas; ajusta y amplía el span</a:t>
-            </a:r>
-          </a:p>
-          <a:p>
-            <a:pPr>
-              <a:spcAft>
-                <a:spcPts val="600"/>
-              </a:spcAft>
-            </a:pPr>
-            <a:r>
-              <a:rPr sz="1500">
-                <a:solidFill>
-                  <a:srgbClr val="22282E"/>
-                </a:solidFill>
-              </a:rPr>
-              <a:t>•  Demodulación da bits aleatorios — Samples/símbolo o umbral mal; recalíbralos en URH</a:t>
-            </a:r>
-          </a:p>
-          <a:p>
-            <a:pPr>
-              <a:spcAft>
-                <a:spcPts val="600"/>
-              </a:spcAft>
-            </a:pPr>
-            <a:r>
-              <a:rPr sz="1500">
-                <a:solidFill>
-                  <a:srgbClr val="22282E"/>
-                </a:solidFill>
-              </a:rPr>
-              <a:t>•  Señal muy débil — Antena inadecuada; usa una sintonizada a la banda</a:t>
-            </a:r>
-          </a:p>
-          <a:p>
-            <a:pPr>
-              <a:spcAft>
-                <a:spcPts val="600"/>
-              </a:spcAft>
-            </a:pPr>
-            <a:r>
-              <a:rPr sz="1500">
-                <a:solidFill>
-                  <a:srgbClr val="22282E"/>
-                </a:solidFill>
-              </a:rPr>
-              <a:t>•  Frecuencia ligeramente desviada — Error de PPM del SDR; calíbralo con rtltest -p</a:t>
+              <a:t>•  Error — Consecuencia</a:t>
+            </a:r>
+          </a:p>
+          <a:p>
+            <a:pPr>
+              <a:spcAft>
+                <a:spcPts val="600"/>
+              </a:spcAft>
+            </a:pPr>
+            <a:r>
+              <a:rPr sz="1500">
+                <a:solidFill>
+                  <a:srgbClr val="22282E"/>
+                </a:solidFill>
+              </a:rPr>
+              <a:t>•  Aumentar ganancia hasta «ver algo» — saturación e imágenes falsas</a:t>
+            </a:r>
+          </a:p>
+          <a:p>
+            <a:pPr>
+              <a:spcAft>
+                <a:spcPts val="600"/>
+              </a:spcAft>
+            </a:pPr>
+            <a:r>
+              <a:rPr sz="1500">
+                <a:solidFill>
+                  <a:srgbClr val="22282E"/>
+                </a:solidFill>
+              </a:rPr>
+              <a:t>•  Llamar analizador calibrado a un SDR — medición de potencia no defendible</a:t>
+            </a:r>
+          </a:p>
+          <a:p>
+            <a:pPr>
+              <a:spcAft>
+                <a:spcPts val="600"/>
+              </a:spcAft>
+            </a:pPr>
+            <a:r>
+              <a:rPr sz="1500">
+                <a:solidFill>
+                  <a:srgbClr val="22282E"/>
+                </a:solidFill>
+              </a:rPr>
+              <a:t>•  Confundir captura con contenido legible — ignora cifrado y protocolo</a:t>
+            </a:r>
+          </a:p>
+          <a:p>
+            <a:pPr>
+              <a:spcAft>
+                <a:spcPts val="600"/>
+              </a:spcAft>
+            </a:pPr>
+            <a:r>
+              <a:rPr sz="1500">
+                <a:solidFill>
+                  <a:srgbClr val="22282E"/>
+                </a:solidFill>
+              </a:rPr>
+              <a:t>•  Ensayar jamming «a baja potencia» — riesgo legal y afectación externa</a:t>
+            </a:r>
+          </a:p>
+          <a:p>
+            <a:pPr>
+              <a:spcAft>
+                <a:spcPts val="600"/>
+              </a:spcAft>
+            </a:pPr>
+            <a:r>
+              <a:rPr sz="1500">
+                <a:solidFill>
+                  <a:srgbClr val="22282E"/>
+                </a:solidFill>
+              </a:rPr>
+              <a:t>•  Atribuir intención desde RSSI/ruido — muchas causas producen el mismo síntoma</a:t>
+            </a:r>
+          </a:p>
+          <a:p>
+            <a:pPr>
+              <a:spcAft>
+                <a:spcPts val="600"/>
+              </a:spcAft>
+            </a:pPr>
+            <a:r>
+              <a:rPr sz="1500">
+                <a:solidFill>
+                  <a:srgbClr val="22282E"/>
+                </a:solidFill>
+              </a:rPr>
+              <a:t>•  Omitir tasa/formato I/Q — archivo difícil o imposible de reproducir</a:t>
             </a:r>
           </a:p>
         </p:txBody>
@@ -3821,82 +3866,52 @@
                   <a:srgbClr val="22282E"/>
                 </a:solidFill>
               </a:rPr>
-              <a:t>•  ❓ ¿Puedo capturar cualquier frecuencia con un RTL-SDR?</a:t>
-            </a:r>
-          </a:p>
-          <a:p>
-            <a:pPr>
-              <a:spcAft>
-                <a:spcPts val="600"/>
-              </a:spcAft>
-            </a:pPr>
-            <a:r>
-              <a:rPr sz="1500">
-                <a:solidFill>
-                  <a:srgbClr val="22282E"/>
-                </a:solidFill>
-              </a:rPr>
-              <a:t>•  No: cubre aproximadamente 24 MHz–1.7 GHz y solo recibe. Para bandas más altas o transmitir necesitas hardware como HackRF, siempre dentro de la ley.</a:t>
-            </a:r>
-          </a:p>
-          <a:p>
-            <a:pPr>
-              <a:spcAft>
-                <a:spcPts val="600"/>
-              </a:spcAft>
-            </a:pPr>
-            <a:r>
-              <a:rPr sz="1500">
-                <a:solidFill>
-                  <a:srgbClr val="22282E"/>
-                </a:solidFill>
-              </a:rPr>
-              <a:t>•  ❓ ¿Es legal escuchar señales de radio?</a:t>
-            </a:r>
-          </a:p>
-          <a:p>
-            <a:pPr>
-              <a:spcAft>
-                <a:spcPts val="600"/>
-              </a:spcAft>
-            </a:pPr>
-            <a:r>
-              <a:rPr sz="1500">
-                <a:solidFill>
-                  <a:srgbClr val="22282E"/>
-                </a:solidFill>
-              </a:rPr>
-              <a:t>•  Depende del país y de la banda. Escuchar tus propios dispositivos en bandas ISM suele ser aceptable; interceptar comunicaciones ajenas o transmitir sin licencia no lo es.</a:t>
-            </a:r>
-          </a:p>
-          <a:p>
-            <a:pPr>
-              <a:spcAft>
-                <a:spcPts val="600"/>
-              </a:spcAft>
-            </a:pPr>
-            <a:r>
-              <a:rPr sz="1500">
-                <a:solidFill>
-                  <a:srgbClr val="22282E"/>
-                </a:solidFill>
-              </a:rPr>
-              <a:t>•  ❓ ¿Qué es un rolling code y por qué importa?</a:t>
-            </a:r>
-          </a:p>
-          <a:p>
-            <a:pPr>
-              <a:spcAft>
-                <a:spcPts val="600"/>
-              </a:spcAft>
-            </a:pPr>
-            <a:r>
-              <a:rPr sz="1500">
-                <a:solidFill>
-                  <a:srgbClr val="22282E"/>
-                </a:solidFill>
-              </a:rPr>
-              <a:t>•  Un código que cambia en cada uso para evitar ataques de repetición; distinguirlo de un código fijo es clave al analizar mandos y sistemas de acceso.</a:t>
+              <a:t>•  ¿HackRF One puede recibir y transmitir a la vez? No; la documentación lo especifica como transceptor half-duplex.</a:t>
+            </a:r>
+          </a:p>
+          <a:p>
+            <a:pPr>
+              <a:spcAft>
+                <a:spcPts val="600"/>
+              </a:spcAft>
+            </a:pPr>
+            <a:r>
+              <a:rPr sz="1500">
+                <a:solidFill>
+                  <a:srgbClr val="22282E"/>
+                </a:solidFill>
+              </a:rPr>
+              <a:t>•  ¿Puedo repetir una señal capturada? Técnicamente depende del protocolo y hardware; legalmente y éticamente requiere autorización y condiciones de espectro. Esta clase no lo practica.</a:t>
+            </a:r>
+          </a:p>
+          <a:p>
+            <a:pPr>
+              <a:spcAft>
+                <a:spcPts val="600"/>
+              </a:spcAft>
+            </a:pPr>
+            <a:r>
+              <a:rPr sz="1500">
+                <a:solidFill>
+                  <a:srgbClr val="22282E"/>
+                </a:solidFill>
+              </a:rPr>
+              <a:t>•  ¿Un Flipper Zero reemplaza HackRF? No. Su módulo sub-GHz y protocolos integrados cubren casos concretos; HackRF expone muestras de una banda mucho más amplia con otra resolución y flujo. Véase la…</a:t>
+            </a:r>
+          </a:p>
+          <a:p>
+            <a:pPr>
+              <a:spcAft>
+                <a:spcPts val="600"/>
+              </a:spcAft>
+            </a:pPr>
+            <a:r>
+              <a:rPr sz="1500">
+                <a:solidFill>
+                  <a:srgbClr val="22282E"/>
+                </a:solidFill>
+              </a:rPr>
+              <a:t>•  ¿Una autorización corporativa permite usar un jammer? No. El permiso sobre activos no sustituye la ley del espectro ni las prohibiciones específicas.</a:t>
             </a:r>
           </a:p>
         </p:txBody>
@@ -3947,7 +3962,7 @@
                   <a:srgbClr val="0B3D2E"/>
                 </a:solidFill>
               </a:rPr>
-              <a:t>🔗 Referencias</a:t>
+              <a:t>🔗 Referencias verificables y alcance</a:t>
             </a:r>
           </a:p>
         </p:txBody>
@@ -3985,52 +4000,97 @@
                   <a:srgbClr val="22282E"/>
                 </a:solidFill>
               </a:rPr>
-              <a:t>•  GNU Radio: &lt;https://www.gnuradio.org/&gt;</a:t>
-            </a:r>
-          </a:p>
-          <a:p>
-            <a:pPr>
-              <a:spcAft>
-                <a:spcPts val="600"/>
-              </a:spcAft>
-            </a:pPr>
-            <a:r>
-              <a:rPr sz="1500">
-                <a:solidFill>
-                  <a:srgbClr val="22282E"/>
-                </a:solidFill>
-              </a:rPr>
-              <a:t>•  Universal Radio Hacker: &lt;https://github.com/jopohl/urh&gt;</a:t>
-            </a:r>
-          </a:p>
-          <a:p>
-            <a:pPr>
-              <a:spcAft>
-                <a:spcPts val="600"/>
-              </a:spcAft>
-            </a:pPr>
-            <a:r>
-              <a:rPr sz="1500">
-                <a:solidFill>
-                  <a:srgbClr val="22282E"/>
-                </a:solidFill>
-              </a:rPr>
-              <a:t>•  RTL-SDR: &lt;https://www.rtl-sdr.com/&gt; · GQRX: &lt;https://gqrx.dk/&gt;</a:t>
-            </a:r>
-          </a:p>
-          <a:p>
-            <a:pPr>
-              <a:spcAft>
-                <a:spcPts val="600"/>
-              </a:spcAft>
-            </a:pPr>
-            <a:r>
-              <a:rPr sz="1500">
-                <a:solidFill>
-                  <a:srgbClr val="22282E"/>
-                </a:solidFill>
-              </a:rPr>
-              <a:t>•  Practical IoT Hacking, caps. de radio — Chantzis et al.</a:t>
+              <a:t>•  Great Scott Gadgets, HackRF One — rango, half-duplex, tasa, resolución e interfaces del modelo.</a:t>
+            </a:r>
+          </a:p>
+          <a:p>
+            <a:pPr>
+              <a:spcAft>
+                <a:spcPts val="600"/>
+              </a:spcAft>
+            </a:pPr>
+            <a:r>
+              <a:rPr sz="1500">
+                <a:solidFill>
+                  <a:srgbClr val="22282E"/>
+                </a:solidFill>
+              </a:rPr>
+              <a:t>•  Great Scott Gadgets, HackRF tools — sintaxis oficial de inventario y recepción/transmisión.</a:t>
+            </a:r>
+          </a:p>
+          <a:p>
+            <a:pPr>
+              <a:spcAft>
+                <a:spcPts val="600"/>
+              </a:spcAft>
+            </a:pPr>
+            <a:r>
+              <a:rPr sz="1500">
+                <a:solidFill>
+                  <a:srgbClr val="22282E"/>
+                </a:solidFill>
+              </a:rPr>
+              <a:t>•  GNU Radio, sitio y documentación oficial — procesamiento reproducible de señales.</a:t>
+            </a:r>
+          </a:p>
+          <a:p>
+            <a:pPr>
+              <a:spcAft>
+                <a:spcPts val="600"/>
+              </a:spcAft>
+            </a:pPr>
+            <a:r>
+              <a:rPr sz="1500">
+                <a:solidFill>
+                  <a:srgbClr val="22282E"/>
+                </a:solidFill>
+              </a:rPr>
+              <a:t>•  SigMF, Specification — metadatos y portabilidad de grabaciones.</a:t>
+            </a:r>
+          </a:p>
+          <a:p>
+            <a:pPr>
+              <a:spcAft>
+                <a:spcPts val="600"/>
+              </a:spcAft>
+            </a:pPr>
+            <a:r>
+              <a:rPr sz="1500">
+                <a:solidFill>
+                  <a:srgbClr val="22282E"/>
+                </a:solidFill>
+              </a:rPr>
+              <a:t>•  SUBTEL, Resolución Exenta 1985 y modificaciones — equipos de alcance reducido, bandas y condiciones; debe comprobarse la versión vigente antes de emitir.</a:t>
+            </a:r>
+          </a:p>
+          <a:p>
+            <a:pPr>
+              <a:spcAft>
+                <a:spcPts val="600"/>
+              </a:spcAft>
+            </a:pPr>
+            <a:r>
+              <a:rPr sz="1500">
+                <a:solidFill>
+                  <a:srgbClr val="22282E"/>
+                </a:solidFill>
+              </a:rPr>
+              <a:t>•  Biblioteca del Congreso Nacional, Ley 18.168, General de Telecomunicaciones — artículo 36 B, interferencia/interceptación y prohibición de dispositivos; texto vigente a la consulta.</a:t>
+            </a:r>
+          </a:p>
+          <a:p>
+            <a:pPr>
+              <a:spcAft>
+                <a:spcPts val="600"/>
+              </a:spcAft>
+            </a:pPr>
+            <a:r>
+              <a:rPr sz="1500">
+                <a:solidFill>
+                  <a:srgbClr val="22282E"/>
+                </a:solidFill>
+              </a:rPr>
+              <a:t>•  Biblioteca del Congreso Nacional, Plan General de Uso del Espectro Radioeléctrico, Decreto 15 — definición de interferencia perjudicial y atribución de bandas.</a:t>
             </a:r>
           </a:p>
         </p:txBody>
@@ -4088,7 +4148,7 @@
       </p:sp>
       <p:pic>
         <p:nvPicPr>
-          <p:cNvPr id="3" name="Picture 2" descr="b0c774a4dc204452.png"/>
+          <p:cNvPr id="3" name="Picture 2" descr="888d77740788fab2.png"/>
           <p:cNvPicPr>
             <a:picLocks noChangeAspect="1"/>
           </p:cNvPicPr>
@@ -4102,8 +4162,8 @@
         </p:blipFill>
         <p:spPr>
           <a:xfrm>
-            <a:off x="457200" y="3506724"/>
-            <a:ext cx="8229600" cy="484632"/>
+            <a:off x="457200" y="3283565"/>
+            <a:ext cx="8229600" cy="930950"/>
           </a:xfrm>
           <a:prstGeom prst="rect">
             <a:avLst/>
@@ -4194,7 +4254,7 @@
                   <a:srgbClr val="22282E"/>
                 </a:solidFill>
               </a:rPr>
-              <a:t>•  Introducir la radio definida por software (SDR) como herramienta para descubrir, capturar y analizar señales inalámbricas más allá de WiFi y Bluetooth: mandos remotos sub-GHz, sensores ISM…</a:t>
+              <a:t>•  Comprender cómo un receptor o transceptor SDR convierte una porción del espectro en muestras digitales, cómo configurar y administrar el banco, y cómo interpretar señales sin confundir recepción…</a:t>
             </a:r>
           </a:p>
         </p:txBody>
@@ -4298,82 +4358,82 @@
                   <a:srgbClr val="22282E"/>
                 </a:solidFill>
               </a:rPr>
-              <a:t>•  Explicar conceptos de RF: muestras IQ, frecuencia central, ancho de banda y modulación.</a:t>
-            </a:r>
-          </a:p>
-          <a:p>
-            <a:pPr>
-              <a:spcAft>
-                <a:spcPts val="600"/>
-              </a:spcAft>
-            </a:pPr>
-            <a:r>
-              <a:rPr sz="1500">
-                <a:solidFill>
-                  <a:srgbClr val="22282E"/>
-                </a:solidFill>
-              </a:rPr>
-              <a:t>•  Configurar un SDR (RTL-SDR/HackRF) con GQRX/SDR#.</a:t>
-            </a:r>
-          </a:p>
-          <a:p>
-            <a:pPr>
-              <a:spcAft>
-                <a:spcPts val="600"/>
-              </a:spcAft>
-            </a:pPr>
-            <a:r>
-              <a:rPr sz="1500">
-                <a:solidFill>
-                  <a:srgbClr val="22282E"/>
-                </a:solidFill>
-              </a:rPr>
-              <a:t>•  Descubrir y localizar señales en el espectro (waterfall).</a:t>
-            </a:r>
-          </a:p>
-          <a:p>
-            <a:pPr>
-              <a:spcAft>
-                <a:spcPts val="600"/>
-              </a:spcAft>
-            </a:pPr>
-            <a:r>
-              <a:rPr sz="1500">
-                <a:solidFill>
-                  <a:srgbClr val="22282E"/>
-                </a:solidFill>
-              </a:rPr>
-              <a:t>•  Capturar señales a fichero IQ para análisis offline.</a:t>
-            </a:r>
-          </a:p>
-          <a:p>
-            <a:pPr>
-              <a:spcAft>
-                <a:spcPts val="600"/>
-              </a:spcAft>
-            </a:pPr>
-            <a:r>
-              <a:rPr sz="1500">
-                <a:solidFill>
-                  <a:srgbClr val="22282E"/>
-                </a:solidFill>
-              </a:rPr>
-              <a:t>•  Demodular señales simples (OOK/ASK, FSK) con GNU Radio o Universal Radio Hacker.</a:t>
-            </a:r>
-          </a:p>
-          <a:p>
-            <a:pPr>
-              <a:spcAft>
-                <a:spcPts val="600"/>
-              </a:spcAft>
-            </a:pPr>
-            <a:r>
-              <a:rPr sz="1500">
-                <a:solidFill>
-                  <a:srgbClr val="22282E"/>
-                </a:solidFill>
-              </a:rPr>
-              <a:t>•  Analizar un protocolo sub-GHz de un dispositivo propio (p. ej. un mando).</a:t>
+              <a:t>•  Explicar frecuencia central, ancho de banda, tasa de muestreo, ganancia, I/Q, modulación y demodulación.</a:t>
+            </a:r>
+          </a:p>
+          <a:p>
+            <a:pPr>
+              <a:spcAft>
+                <a:spcPts val="600"/>
+              </a:spcAft>
+            </a:pPr>
+            <a:r>
+              <a:rPr sz="1500">
+                <a:solidFill>
+                  <a:srgbClr val="22282E"/>
+                </a:solidFill>
+              </a:rPr>
+              <a:t>•  Diferenciar receptor SDR, transceptor, analizador de espectro y equipo calibrado de medición.</a:t>
+            </a:r>
+          </a:p>
+          <a:p>
+            <a:pPr>
+              <a:spcAft>
+                <a:spcPts val="600"/>
+              </a:spcAft>
+            </a:pPr>
+            <a:r>
+              <a:rPr sz="1500">
+                <a:solidFill>
+                  <a:srgbClr val="22282E"/>
+                </a:solidFill>
+              </a:rPr>
+              <a:t>•  Configurar HackRF One o un receptor compatible para recepción dentro de límites documentados.</a:t>
+            </a:r>
+          </a:p>
+          <a:p>
+            <a:pPr>
+              <a:spcAft>
+                <a:spcPts val="600"/>
+              </a:spcAft>
+            </a:pPr>
+            <a:r>
+              <a:rPr sz="1500">
+                <a:solidFill>
+                  <a:srgbClr val="22282E"/>
+                </a:solidFill>
+              </a:rPr>
+              <a:t>•  Administrar firmware, host, antenas, atenuación, almacenamiento y restauración del equipo de laboratorio.</a:t>
+            </a:r>
+          </a:p>
+          <a:p>
+            <a:pPr>
+              <a:spcAft>
+                <a:spcPts val="600"/>
+              </a:spcAft>
+            </a:pPr>
+            <a:r>
+              <a:rPr sz="1500">
+                <a:solidFill>
+                  <a:srgbClr val="22282E"/>
+                </a:solidFill>
+              </a:rPr>
+              <a:t>•  Analizar una grabación SigMF/IQ conocida y justificar frecuencia, tiempo y confianza de la conclusión.</a:t>
+            </a:r>
+          </a:p>
+          <a:p>
+            <a:pPr>
+              <a:spcAft>
+                <a:spcPts val="600"/>
+              </a:spcAft>
+            </a:pPr>
+            <a:r>
+              <a:rPr sz="1500">
+                <a:solidFill>
+                  <a:srgbClr val="22282E"/>
+                </a:solidFill>
+              </a:rPr>
+              <a:t>•  Distinguir captura, acceso al contenido, transmisión, repetición, suplantación y jamming.</a:t>
             </a:r>
           </a:p>
         </p:txBody>
@@ -4462,97 +4522,97 @@
                   <a:srgbClr val="22282E"/>
                 </a:solidFill>
               </a:rPr>
-              <a:t>•  1 — Fundamentos de RF e IQ</a:t>
-            </a:r>
-          </a:p>
-          <a:p>
-            <a:pPr>
-              <a:spcAft>
-                <a:spcPts val="600"/>
-              </a:spcAft>
-            </a:pPr>
-            <a:r>
-              <a:rPr sz="1500">
-                <a:solidFill>
-                  <a:srgbClr val="22282E"/>
-                </a:solidFill>
-              </a:rPr>
-              <a:t>•  2 — Hardware SDR (RTL-SDR/HackRF)</a:t>
-            </a:r>
-          </a:p>
-          <a:p>
-            <a:pPr>
-              <a:spcAft>
-                <a:spcPts val="600"/>
-              </a:spcAft>
-            </a:pPr>
-            <a:r>
-              <a:rPr sz="1500">
-                <a:solidFill>
-                  <a:srgbClr val="22282E"/>
-                </a:solidFill>
-              </a:rPr>
-              <a:t>•  3 — Waterfall y descubrimiento</a:t>
-            </a:r>
-          </a:p>
-          <a:p>
-            <a:pPr>
-              <a:spcAft>
-                <a:spcPts val="600"/>
-              </a:spcAft>
-            </a:pPr>
-            <a:r>
-              <a:rPr sz="1500">
-                <a:solidFill>
-                  <a:srgbClr val="22282E"/>
-                </a:solidFill>
-              </a:rPr>
-              <a:t>•  4 — Modulaciones (OOK/ASK, FSK)</a:t>
-            </a:r>
-          </a:p>
-          <a:p>
-            <a:pPr>
-              <a:spcAft>
-                <a:spcPts val="600"/>
-              </a:spcAft>
-            </a:pPr>
-            <a:r>
-              <a:rPr sz="1500">
-                <a:solidFill>
-                  <a:srgbClr val="22282E"/>
-                </a:solidFill>
-              </a:rPr>
-              <a:t>•  5 — Captura IQ</a:t>
-            </a:r>
-          </a:p>
-          <a:p>
-            <a:pPr>
-              <a:spcAft>
-                <a:spcPts val="600"/>
-              </a:spcAft>
-            </a:pPr>
-            <a:r>
-              <a:rPr sz="1500">
-                <a:solidFill>
-                  <a:srgbClr val="22282E"/>
-                </a:solidFill>
-              </a:rPr>
-              <a:t>•  6 — GNU Radio y URH</a:t>
-            </a:r>
-          </a:p>
-          <a:p>
-            <a:pPr>
-              <a:spcAft>
-                <a:spcPts val="600"/>
-              </a:spcAft>
-            </a:pPr>
-            <a:r>
-              <a:rPr sz="1500">
-                <a:solidFill>
-                  <a:srgbClr val="22282E"/>
-                </a:solidFill>
-              </a:rPr>
-              <a:t>•  7 — Legalidad del espectro</a:t>
+              <a:t>•  1 — Cadena RF–IQ</a:t>
+            </a:r>
+          </a:p>
+          <a:p>
+            <a:pPr>
+              <a:spcAft>
+                <a:spcPts val="600"/>
+              </a:spcAft>
+            </a:pPr>
+            <a:r>
+              <a:rPr sz="1500">
+                <a:solidFill>
+                  <a:srgbClr val="22282E"/>
+                </a:solidFill>
+              </a:rPr>
+              <a:t>•  2 — Hardware y accesorios</a:t>
+            </a:r>
+          </a:p>
+          <a:p>
+            <a:pPr>
+              <a:spcAft>
+                <a:spcPts val="600"/>
+              </a:spcAft>
+            </a:pPr>
+            <a:r>
+              <a:rPr sz="1500">
+                <a:solidFill>
+                  <a:srgbClr val="22282E"/>
+                </a:solidFill>
+              </a:rPr>
+              <a:t>•  3 — Configuración y calibración</a:t>
+            </a:r>
+          </a:p>
+          <a:p>
+            <a:pPr>
+              <a:spcAft>
+                <a:spcPts val="600"/>
+              </a:spcAft>
+            </a:pPr>
+            <a:r>
+              <a:rPr sz="1500">
+                <a:solidFill>
+                  <a:srgbClr val="22282E"/>
+                </a:solidFill>
+              </a:rPr>
+              <a:t>•  4 — Recepción y demodulación</a:t>
+            </a:r>
+          </a:p>
+          <a:p>
+            <a:pPr>
+              <a:spcAft>
+                <a:spcPts val="600"/>
+              </a:spcAft>
+            </a:pPr>
+            <a:r>
+              <a:rPr sz="1500">
+                <a:solidFill>
+                  <a:srgbClr val="22282E"/>
+                </a:solidFill>
+              </a:rPr>
+              <a:t>•  5 — Transmisión y regulación</a:t>
+            </a:r>
+          </a:p>
+          <a:p>
+            <a:pPr>
+              <a:spcAft>
+                <a:spcPts val="600"/>
+              </a:spcAft>
+            </a:pPr>
+            <a:r>
+              <a:rPr sz="1500">
+                <a:solidFill>
+                  <a:srgbClr val="22282E"/>
+                </a:solidFill>
+              </a:rPr>
+              <a:t>•  6 — Interferencia y jamming</a:t>
+            </a:r>
+          </a:p>
+          <a:p>
+            <a:pPr>
+              <a:spcAft>
+                <a:spcPts val="600"/>
+              </a:spcAft>
+            </a:pPr>
+            <a:r>
+              <a:rPr sz="1500">
+                <a:solidFill>
+                  <a:srgbClr val="22282E"/>
+                </a:solidFill>
+              </a:rPr>
+              <a:t>•  7 — Telemetría y atribución</a:t>
             </a:r>
           </a:p>
         </p:txBody>
@@ -4641,52 +4701,97 @@
                   <a:srgbClr val="22282E"/>
                 </a:solidFill>
               </a:rPr>
-              <a:t>•  SDR traslada filtrado, demodulación y decodificación al software. El receptor mezcla una banda alrededor de la frecuencia central y muestrea componentes I/Q. La tasa de muestreo limita el ancho…</a:t>
-            </a:r>
-          </a:p>
-          <a:p>
-            <a:pPr>
-              <a:spcAft>
-                <a:spcPts val="600"/>
-              </a:spcAft>
-            </a:pPr>
-            <a:r>
-              <a:rPr sz="1500">
-                <a:solidFill>
-                  <a:srgbClr val="22282E"/>
-                </a:solidFill>
-              </a:rPr>
-              <a:t>•  El análisis parte de una transmisión propia de baja potencia o un archivo de captura publicado. Se registra hardware, frecuencia central, tasa, ganancia, reloj y entorno. Primero se distingue ruido…</a:t>
-            </a:r>
-          </a:p>
-          <a:p>
-            <a:pPr>
-              <a:spcAft>
-                <a:spcPts val="600"/>
-              </a:spcAft>
-            </a:pPr>
-            <a:r>
-              <a:rPr sz="1500">
-                <a:solidFill>
-                  <a:srgbClr val="22282E"/>
-                </a:solidFill>
-              </a:rPr>
-              <a:t>•  Recibir o transmitir está regulado de forma distinta según país, banda y contenido. Algunos servicios no pueden interceptarse ni decodificarse aunque la señal sea físicamente accesible. Transmitir…</a:t>
-            </a:r>
-          </a:p>
-          <a:p>
-            <a:pPr>
-              <a:spcAft>
-                <a:spcPts val="600"/>
-              </a:spcAft>
-            </a:pPr>
-            <a:r>
-              <a:rPr sz="1500">
-                <a:solidFill>
-                  <a:srgbClr val="22282E"/>
-                </a:solidFill>
-              </a:rPr>
-              <a:t>•  Un pico aparece simétrico respecto del centro y cambia al variar ganancia. No se atribuye a dos transmisores: se evalúa imagen o saturación del front-end, se reduce ganancia, cambia frecuencia…</a:t>
+              <a:t>•  La antena convierte energía electromagnética en una señal eléctrica. El frente RF filtra, amplifica y mezcla una banda alrededor de una frecuencia central. El convertidor entrega pares I/Q: dos…</a:t>
+            </a:r>
+          </a:p>
+          <a:p>
+            <a:pPr>
+              <a:spcAft>
+                <a:spcPts val="600"/>
+              </a:spcAft>
+            </a:pPr>
+            <a:r>
+              <a:rPr sz="1500">
+                <a:solidFill>
+                  <a:srgbClr val="22282E"/>
+                </a:solidFill>
+              </a:rPr>
+              <a:t>•  La tasa de muestreo limita el ancho de banda observable y también el volumen de datos. Más ganancia no significa «más alcance» sin costo: amplifica señal y ruido y puede saturar. Una línea en la…</a:t>
+            </a:r>
+          </a:p>
+          <a:p>
+            <a:pPr>
+              <a:spcAft>
+                <a:spcPts val="600"/>
+              </a:spcAft>
+            </a:pPr>
+            <a:r>
+              <a:rPr sz="1500">
+                <a:solidFill>
+                  <a:srgbClr val="22282E"/>
+                </a:solidFill>
+              </a:rPr>
+              <a:t>•  El diagrama impide un salto frecuente: ver energía no equivale a entender un protocolo; capturar tramas no concede claves; conocer claves no autoriza interceptar comunicaciones. Cada transición…</a:t>
+            </a:r>
+          </a:p>
+          <a:p>
+            <a:pPr>
+              <a:spcAft>
+                <a:spcPts val="600"/>
+              </a:spcAft>
+            </a:pPr>
+            <a:r>
+              <a:rPr sz="1500">
+                <a:solidFill>
+                  <a:srgbClr val="22282E"/>
+                </a:solidFill>
+              </a:rPr>
+              <a:t>•  La documentación estable de HackRF One lo define como transceptor half-duplex de 1 MHz a 6 GHz, con muestras I/Q de 8 bits y tasas documentadas de 2 a 20 Msps. Half-duplex significa que transmite o…</a:t>
+            </a:r>
+          </a:p>
+          <a:p>
+            <a:pPr>
+              <a:spcAft>
+                <a:spcPts val="600"/>
+              </a:spcAft>
+            </a:pPr>
+            <a:r>
+              <a:rPr sz="1500">
+                <a:solidFill>
+                  <a:srgbClr val="22282E"/>
+                </a:solidFill>
+              </a:rPr>
+              <a:t>•  Un RTL-SDR típico es receptor y cubre un rango distinto según sintonizador; resulta más barato y reduce el riesgo de transmisión accidental. Un analizador de espectro dedicado puede aportar rango…</a:t>
+            </a:r>
+          </a:p>
+          <a:p>
+            <a:pPr>
+              <a:spcAft>
+                <a:spcPts val="600"/>
+              </a:spcAft>
+            </a:pPr>
+            <a:r>
+              <a:rPr sz="1500">
+                <a:solidFill>
+                  <a:srgbClr val="22282E"/>
+                </a:solidFill>
+              </a:rPr>
+              <a:t>•  Controlar el dispositivo de laboratorio implica:</a:t>
+            </a:r>
+          </a:p>
+          <a:p>
+            <a:pPr>
+              <a:spcAft>
+                <a:spcPts val="600"/>
+              </a:spcAft>
+            </a:pPr>
+            <a:r>
+              <a:rPr sz="1500">
+                <a:solidFill>
+                  <a:srgbClr val="22282E"/>
+                </a:solidFill>
+              </a:rPr>
+              <a:t>•  Registrar modelo, número de serie, revisión, versión de firmware y versión de hackrf-tools/GNU Radio.</a:t>
             </a:r>
           </a:p>
         </p:txBody>
@@ -4737,7 +4842,7 @@
                   <a:srgbClr val="0B3D2E"/>
                 </a:solidFill>
               </a:rPr>
-              <a:t>📔 Glosario operativo</a:t>
+              <a:t>📖 Definiciones y características</a:t>
             </a:r>
           </a:p>
         </p:txBody>
@@ -4775,82 +4880,97 @@
                   <a:srgbClr val="22282E"/>
                 </a:solidFill>
               </a:rPr>
-              <a:t>•  Término — Definición útil</a:t>
-            </a:r>
-          </a:p>
-          <a:p>
-            <a:pPr>
-              <a:spcAft>
-                <a:spcPts val="600"/>
-              </a:spcAft>
-            </a:pPr>
-            <a:r>
-              <a:rPr sz="1500">
-                <a:solidFill>
-                  <a:srgbClr val="22282E"/>
-                </a:solidFill>
-              </a:rPr>
-              <a:t>•  I/Q — Dos componentes ortogonales que conservan amplitud y fase.</a:t>
-            </a:r>
-          </a:p>
-          <a:p>
-            <a:pPr>
-              <a:spcAft>
-                <a:spcPts val="600"/>
-              </a:spcAft>
-            </a:pPr>
-            <a:r>
-              <a:rPr sz="1500">
-                <a:solidFill>
-                  <a:srgbClr val="22282E"/>
-                </a:solidFill>
-              </a:rPr>
-              <a:t>•  Tasa de muestreo — Número de muestras por segundo y límite práctico de banda observada.</a:t>
-            </a:r>
-          </a:p>
-          <a:p>
-            <a:pPr>
-              <a:spcAft>
-                <a:spcPts val="600"/>
-              </a:spcAft>
-            </a:pPr>
-            <a:r>
-              <a:rPr sz="1500">
-                <a:solidFill>
-                  <a:srgbClr val="22282E"/>
-                </a:solidFill>
-              </a:rPr>
-              <a:t>•  Saturación — Sobrecarga que distorsiona y crea señales espurias.</a:t>
-            </a:r>
-          </a:p>
-          <a:p>
-            <a:pPr>
-              <a:spcAft>
-                <a:spcPts val="600"/>
-              </a:spcAft>
-            </a:pPr>
-            <a:r>
-              <a:rPr sz="1500">
-                <a:solidFill>
-                  <a:srgbClr val="22282E"/>
-                </a:solidFill>
-              </a:rPr>
-              <a:t>•  Demodulación — Recuperación de símbolos o información desde una portadora modulada.</a:t>
-            </a:r>
-          </a:p>
-          <a:p>
-            <a:pPr>
-              <a:spcAft>
-                <a:spcPts val="600"/>
-              </a:spcAft>
-            </a:pPr>
-            <a:r>
-              <a:rPr sz="1500">
-                <a:solidFill>
-                  <a:srgbClr val="22282E"/>
-                </a:solidFill>
-              </a:rPr>
-              <a:t>•  PPM — Error relativo de frecuencia del oscilador.</a:t>
+              <a:t>•  SDR: radio donde funciones como filtrado/demodulación se implementan en software alrededor de hardware RF.</a:t>
+            </a:r>
+          </a:p>
+          <a:p>
+            <a:pPr>
+              <a:spcAft>
+                <a:spcPts val="600"/>
+              </a:spcAft>
+            </a:pPr>
+            <a:r>
+              <a:rPr sz="1500">
+                <a:solidFill>
+                  <a:srgbClr val="22282E"/>
+                </a:solidFill>
+              </a:rPr>
+              <a:t>•  I/Q: componentes ortogonales de una señal compleja muestreada.</a:t>
+            </a:r>
+          </a:p>
+          <a:p>
+            <a:pPr>
+              <a:spcAft>
+                <a:spcPts val="600"/>
+              </a:spcAft>
+            </a:pPr>
+            <a:r>
+              <a:rPr sz="1500">
+                <a:solidFill>
+                  <a:srgbClr val="22282E"/>
+                </a:solidFill>
+              </a:rPr>
+              <a:t>•  Frecuencia central: punto alrededor del cual el receptor captura una banda.</a:t>
+            </a:r>
+          </a:p>
+          <a:p>
+            <a:pPr>
+              <a:spcAft>
+                <a:spcPts val="600"/>
+              </a:spcAft>
+            </a:pPr>
+            <a:r>
+              <a:rPr sz="1500">
+                <a:solidFill>
+                  <a:srgbClr val="22282E"/>
+                </a:solidFill>
+              </a:rPr>
+              <a:t>•  Tasa de muestreo: muestras por segundo; condiciona banda observable y almacenamiento.</a:t>
+            </a:r>
+          </a:p>
+          <a:p>
+            <a:pPr>
+              <a:spcAft>
+                <a:spcPts val="600"/>
+              </a:spcAft>
+            </a:pPr>
+            <a:r>
+              <a:rPr sz="1500">
+                <a:solidFill>
+                  <a:srgbClr val="22282E"/>
+                </a:solidFill>
+              </a:rPr>
+              <a:t>•  Ganancia: amplificación; demasiado alta satura y crea conclusiones falsas.</a:t>
+            </a:r>
+          </a:p>
+          <a:p>
+            <a:pPr>
+              <a:spcAft>
+                <a:spcPts val="600"/>
+              </a:spcAft>
+            </a:pPr>
+            <a:r>
+              <a:rPr sz="1500">
+                <a:solidFill>
+                  <a:srgbClr val="22282E"/>
+                </a:solidFill>
+              </a:rPr>
+              <a:t>•  Cascada: espectro apilado en el tiempo; permite correlacionar duración y cambios.</a:t>
+            </a:r>
+          </a:p>
+          <a:p>
+            <a:pPr>
+              <a:spcAft>
+                <a:spcPts val="600"/>
+              </a:spcAft>
+            </a:pPr>
+            <a:r>
+              <a:rPr sz="1500">
+                <a:solidFill>
+                  <a:srgbClr val="22282E"/>
+                </a:solidFill>
+              </a:rPr>
+              <a:t>•  Half-duplex: operación alternada de recepción o transmisión.</a:t>
             </a:r>
           </a:p>
         </p:txBody>
@@ -4901,7 +5021,7 @@
                   <a:srgbClr val="0B3D2E"/>
                 </a:solidFill>
               </a:rPr>
-              <a:t>✅ Criterio de dominio</a:t>
+              <a:t>📔 Glosario operativo</a:t>
             </a:r>
           </a:p>
         </p:txBody>
@@ -4939,7 +5059,97 @@
                   <a:srgbClr val="22282E"/>
                 </a:solidFill>
               </a:rPr>
-              <a:t>•  El alumno domina SDR cuando configura una captura reproducible, distingue artefactos del receptor, explica el camino IQ a trama y mantiene recepción y emisión dentro de permisos y aislamiento.</a:t>
+              <a:t>•  Término — Definición útil</a:t>
+            </a:r>
+          </a:p>
+          <a:p>
+            <a:pPr>
+              <a:spcAft>
+                <a:spcPts val="600"/>
+              </a:spcAft>
+            </a:pPr>
+            <a:r>
+              <a:rPr sz="1500">
+                <a:solidFill>
+                  <a:srgbClr val="22282E"/>
+                </a:solidFill>
+              </a:rPr>
+              <a:t>•  FFT — Transformación que aproxima contenido por frecuencia en una ventana.</a:t>
+            </a:r>
+          </a:p>
+          <a:p>
+            <a:pPr>
+              <a:spcAft>
+                <a:spcPts val="600"/>
+              </a:spcAft>
+            </a:pPr>
+            <a:r>
+              <a:rPr sz="1500">
+                <a:solidFill>
+                  <a:srgbClr val="22282E"/>
+                </a:solidFill>
+              </a:rPr>
+              <a:t>•  SNR — Relación entre señal y ruido bajo condiciones definidas.</a:t>
+            </a:r>
+          </a:p>
+          <a:p>
+            <a:pPr>
+              <a:spcAft>
+                <a:spcPts val="600"/>
+              </a:spcAft>
+            </a:pPr>
+            <a:r>
+              <a:rPr sz="1500">
+                <a:solidFill>
+                  <a:srgbClr val="22282E"/>
+                </a:solidFill>
+              </a:rPr>
+              <a:t>•  Saturación — Entrada excede rango y distorsiona la captura.</a:t>
+            </a:r>
+          </a:p>
+          <a:p>
+            <a:pPr>
+              <a:spcAft>
+                <a:spcPts val="600"/>
+              </a:spcAft>
+            </a:pPr>
+            <a:r>
+              <a:rPr sz="1500">
+                <a:solidFill>
+                  <a:srgbClr val="22282E"/>
+                </a:solidFill>
+              </a:rPr>
+              <a:t>•  Frecuencia imagen — Respuesta no deseada que puede parecer señal real.</a:t>
+            </a:r>
+          </a:p>
+          <a:p>
+            <a:pPr>
+              <a:spcAft>
+                <a:spcPts val="600"/>
+              </a:spcAft>
+            </a:pPr>
+            <a:r>
+              <a:rPr sz="1500">
+                <a:solidFill>
+                  <a:srgbClr val="22282E"/>
+                </a:solidFill>
+              </a:rPr>
+              <a:t>•  PPM — Error relativo de frecuencia del reloj.</a:t>
+            </a:r>
+          </a:p>
+          <a:p>
+            <a:pPr>
+              <a:spcAft>
+                <a:spcPts val="600"/>
+              </a:spcAft>
+            </a:pPr>
+            <a:r>
+              <a:rPr sz="1500">
+                <a:solidFill>
+                  <a:srgbClr val="22282E"/>
+                </a:solidFill>
+              </a:rPr>
+              <a:t>•  LNA — Amplificador de bajo ruido; no corrige saturación previa.</a:t>
             </a:r>
           </a:p>
         </p:txBody>
@@ -4990,7 +5200,7 @@
                   <a:srgbClr val="0B3D2E"/>
                 </a:solidFill>
               </a:rPr>
-              <a:t>📖 Definiciones y características</a:t>
+              <a:t>✅ Criterio de dominio</a:t>
             </a:r>
           </a:p>
         </p:txBody>
@@ -5028,82 +5238,7 @@
                   <a:srgbClr val="22282E"/>
                 </a:solidFill>
               </a:rPr>
-              <a:t>•  SDR: radio cuyo procesamiento se hace en software sobre muestras digitalizadas. Característica: flexible para muchas bandas y protocolos.</a:t>
-            </a:r>
-          </a:p>
-          <a:p>
-            <a:pPr>
-              <a:spcAft>
-                <a:spcPts val="600"/>
-              </a:spcAft>
-            </a:pPr>
-            <a:r>
-              <a:rPr sz="1500">
-                <a:solidFill>
-                  <a:srgbClr val="22282E"/>
-                </a:solidFill>
-              </a:rPr>
-              <a:t>•  Muestras IQ: representación compleja de una banda mediante componentes en fase y cuadratura. Característica: conserva información útil de amplitud y fase dentro de ancho, tasa y calidad capturados…</a:t>
-            </a:r>
-          </a:p>
-          <a:p>
-            <a:pPr>
-              <a:spcAft>
-                <a:spcPts val="600"/>
-              </a:spcAft>
-            </a:pPr>
-            <a:r>
-              <a:rPr sz="1500">
-                <a:solidFill>
-                  <a:srgbClr val="22282E"/>
-                </a:solidFill>
-              </a:rPr>
-              <a:t>•  OOK/ASK: modulación por presencia/ausencia o amplitud de portadora, típica de mandos baratos. Característica: fácil de demodular visualmente.</a:t>
-            </a:r>
-          </a:p>
-          <a:p>
-            <a:pPr>
-              <a:spcAft>
-                <a:spcPts val="600"/>
-              </a:spcAft>
-            </a:pPr>
-            <a:r>
-              <a:rPr sz="1500">
-                <a:solidFill>
-                  <a:srgbClr val="22282E"/>
-                </a:solidFill>
-              </a:rPr>
-              <a:t>•  FSK: modulación por desplazamiento de frecuencia. Característica: común en sensores y telemetría.</a:t>
-            </a:r>
-          </a:p>
-          <a:p>
-            <a:pPr>
-              <a:spcAft>
-                <a:spcPts val="600"/>
-              </a:spcAft>
-            </a:pPr>
-            <a:r>
-              <a:rPr sz="1500">
-                <a:solidFill>
-                  <a:srgbClr val="22282E"/>
-                </a:solidFill>
-              </a:rPr>
-              <a:t>•  GNU Radio: framework de flujogramas para procesar señales. Característica: construye demoduladores por bloques.</a:t>
-            </a:r>
-          </a:p>
-          <a:p>
-            <a:pPr>
-              <a:spcAft>
-                <a:spcPts val="600"/>
-              </a:spcAft>
-            </a:pPr>
-            <a:r>
-              <a:rPr sz="1500">
-                <a:solidFill>
-                  <a:srgbClr val="22282E"/>
-                </a:solidFill>
-              </a:rPr>
-              <a:t>•  Universal Radio Hacker (URH): herramienta que descubre, demodula y decodifica protocolos inalámbricos. Característica: acelera el análisis de tramas.</a:t>
+              <a:t>•  Hay dominio cuando el alumno conserva metadatos y originales, distingue artefacto de señal mediante controles, no extrapola contenido desde energía, construye diagnóstico diferencial y propone…</a:t>
             </a:r>
           </a:p>
         </p:txBody>
@@ -5192,22 +5327,37 @@
                   <a:srgbClr val="22282E"/>
                 </a:solidFill>
               </a:rPr>
-              <a:t>•  RTL-SDR (recepción, ~24–1766 MHz) o HackRF One (TX/RX 1 MHz–6 GHz, solo TX en laboratorio propio y bandas permitidas).</a:t>
-            </a:r>
-          </a:p>
-          <a:p>
-            <a:pPr>
-              <a:spcAft>
-                <a:spcPts val="600"/>
-              </a:spcAft>
-            </a:pPr>
-            <a:r>
-              <a:rPr sz="1500">
-                <a:solidFill>
-                  <a:srgbClr val="22282E"/>
-                </a:solidFill>
-              </a:rPr>
-              <a:t>•  GQRX/SDR# para exploración, GNU Radio Companion y URH para análisis.</a:t>
+              <a:t>•  Ruta con recepción física: HackRF One o receptor SDR compatible; antena de banda; atenuador/filtro cuando proceda; portátil aislado; hackrf-tools, GNU Radio, Universal Radio Hacker o inspectores…</a:t>
+            </a:r>
+          </a:p>
+          <a:p>
+            <a:pPr>
+              <a:spcAft>
+                <a:spcPts val="600"/>
+              </a:spcAft>
+            </a:pPr>
+            <a:r>
+              <a:rPr sz="1500">
+                <a:solidFill>
+                  <a:srgbClr val="22282E"/>
+                </a:solidFill>
+              </a:rPr>
+              <a:t>•  El comando produce muestras crudas de 8 bits intercaladas según hackrftransfer; frecuencia, tasa, ganancia y duración deben quedar en el manifiesto. Una frecuencia de ejemplo no concede permiso para…</a:t>
+            </a:r>
+          </a:p>
+          <a:p>
+            <a:pPr>
+              <a:spcAft>
+                <a:spcPts val="600"/>
+              </a:spcAft>
+            </a:pPr>
+            <a:r>
+              <a:rPr sz="1500">
+                <a:solidFill>
+                  <a:srgbClr val="22282E"/>
+                </a:solidFill>
+              </a:rPr>
+              <a:t>•  Ruta sin hardware: dataset SigMF del instructor con tres escenarios: señal propia limpia, artefacto de saturación y periodo de degradación sintética. Se evalúan lectura de espectro, metadatos…</a:t>
             </a:r>
           </a:p>
         </p:txBody>
